--- a/PPT/CSEP23605 Review 0 Template.pptx
+++ b/PPT/CSEP23605 Review 0 Template.pptx
@@ -213,7 +213,7 @@
           <a:p>
             <a:fld id="{830881A4-97E0-4626-BA30-074D23D3B5E2}" type="datetimeFigureOut">
               <a:rPr lang="en-IN" smtClean="0"/>
-              <a:t>26-02-2026</a:t>
+              <a:t>27-02-2026</a:t>
             </a:fld>
             <a:endParaRPr lang="en-IN"/>
           </a:p>
@@ -3655,7 +3655,7 @@
           <p:nvPr>
             <p:extLst>
               <p:ext uri="{D42A27DB-BD31-4B8C-83A1-F6EECF244321}">
-                <p14:modId xmlns:p14="http://schemas.microsoft.com/office/powerpoint/2010/main" val="2911774077"/>
+                <p14:modId xmlns:p14="http://schemas.microsoft.com/office/powerpoint/2010/main" val="4246674439"/>
               </p:ext>
             </p:extLst>
           </p:nvPr>
@@ -5150,6 +5150,16 @@
                         <a:t> </a:t>
                       </a:r>
                       <a:r>
+                        <a:rPr lang="en-US" sz="2200" b="1">
+                          <a:solidFill>
+                            <a:schemeClr val="tx1"/>
+                          </a:solidFill>
+                          <a:latin typeface="Cambria" panose="02040503050406030204" pitchFamily="18" charset="0"/>
+                          <a:ea typeface="Cambria" panose="02040503050406030204" pitchFamily="18" charset="0"/>
+                        </a:rPr>
+                        <a:t>,  Assistant </a:t>
+                      </a:r>
+                      <a:r>
                         <a:rPr lang="en-US" sz="2200" b="1" dirty="0">
                           <a:solidFill>
                             <a:schemeClr val="tx1"/>
@@ -5157,7 +5167,7 @@
                           <a:latin typeface="Cambria" panose="02040503050406030204" pitchFamily="18" charset="0"/>
                           <a:ea typeface="Cambria" panose="02040503050406030204" pitchFamily="18" charset="0"/>
                         </a:rPr>
-                        <a:t>,  Associate Professor</a:t>
+                        <a:t>Professor</a:t>
                       </a:r>
                       <a:endParaRPr lang="en-IN" sz="2200" b="1" dirty="0">
                         <a:solidFill>
